--- a/templates/carousels/photo-led-carousel.pptx
+++ b/templates/carousels/photo-led-carousel.pptx
@@ -506,7 +506,7 @@
           <a:lstStyle/>
           <a:p>
             <a:r>
-              <a:t>Cover. Photo: real SFW photo, people looking away or at the land works best. Keep both panels off faces.</a:t>
+              <a:t>Cover. Photo: assets/photo/erc-rancho-cacachilas-agro2.jpg. Swap for a photo that fits the occasion.</a:t>
             </a:r>
           </a:p>
         </p:txBody>
@@ -576,7 +576,7 @@
           <a:lstStyle/>
           <a:p>
             <a:r>
-              <a:t>Any fact needs a named source before posting. Do not paste unsourced science claims.</a:t>
+              <a:t>Photo: assets/photo/wild-ken-hill-img-1494.jpg (Wild Ken Hill, June 2026). Panels sit above the faces. Any fact needs a named source before posting.</a:t>
             </a:r>
           </a:p>
         </p:txBody>
@@ -646,7 +646,7 @@
           <a:lstStyle/>
           <a:p>
             <a:r>
-              <a:t>Keep panels above the crowd. Move a panel if it covers faces.</a:t>
+              <a:t>Photo: assets/photo/workshop-group-around-compost-pile.jpg. Panels sit in the roof space. Move a panel if it covers faces.</a:t>
             </a:r>
           </a:p>
         </p:txBody>
@@ -716,7 +716,7 @@
           <a:lstStyle/>
           <a:p>
             <a:r>
-              <a:t>Same layout, panels lower.</a:t>
+              <a:t>Photo: assets/photo/hand-soil-roots-fungi.jpg. Same layout, panels kept to the top third.</a:t>
             </a:r>
           </a:p>
         </p:txBody>
@@ -786,7 +786,7 @@
           <a:lstStyle/>
           <a:p>
             <a:r>
-              <a:t>Closing. One call to action only.</a:t>
+              <a:t>Closing. One call to action only. Photo: assets/photo/wild-ken-hill-img-1502.jpg (Wild Ken Hill, June 2026).</a:t>
             </a:r>
           </a:p>
         </p:txBody>
@@ -3792,12 +3792,20 @@
         <p:nvPr/>
       </p:nvGrpSpPr>
       <p:grpSpPr/>
-      <p:sp>
-        <p:nvSpPr>
-          <p:cNvPr id="2" name="Rectangle 1"/>
-          <p:cNvSpPr/>
+      <p:pic>
+        <p:nvPicPr>
+          <p:cNvPr id="2" name="Picture 1" descr="3812193197056478006.jpg"/>
+          <p:cNvPicPr>
+            <a:picLocks noChangeAspect="1"/>
+          </p:cNvPicPr>
           <p:nvPr/>
-        </p:nvSpPr>
+        </p:nvPicPr>
+        <p:blipFill>
+          <a:blip r:embed="rId2"/>
+          <a:stretch>
+            <a:fillRect/>
+          </a:stretch>
+        </p:blipFill>
         <p:spPr>
           <a:xfrm>
             <a:off x="0" y="0"/>
@@ -3806,49 +3814,8 @@
           <a:prstGeom prst="rect">
             <a:avLst/>
           </a:prstGeom>
-          <a:solidFill>
-            <a:srgbClr val="A7B097"/>
-          </a:solidFill>
-          <a:ln>
-            <a:noFill/>
-          </a:ln>
-          <a:effectLst/>
-        </p:spPr>
-        <p:style>
-          <a:lnRef idx="1">
-            <a:schemeClr val="accent1"/>
-          </a:lnRef>
-          <a:fillRef idx="3">
-            <a:schemeClr val="accent1"/>
-          </a:fillRef>
-          <a:effectRef idx="2">
-            <a:schemeClr val="accent1"/>
-          </a:effectRef>
-          <a:fontRef idx="minor">
-            <a:schemeClr val="lt1"/>
-          </a:fontRef>
-        </p:style>
-        <p:txBody>
-          <a:bodyPr rtlCol="0" anchor="ctr" wrap="square" lIns="30" rIns="30" tIns="14" bIns="14"/>
-          <a:lstStyle/>
-          <a:p>
-            <a:pPr algn="ctr">
-              <a:lnSpc>
-                <a:spcPct val="105000"/>
-              </a:lnSpc>
-            </a:pPr>
-            <a:r>
-              <a:rPr sz="3300" b="1">
-                <a:solidFill>
-                  <a:srgbClr val="22371F"/>
-                </a:solidFill>
-                <a:latin typeface="Montserrat"/>
-              </a:rPr>
-              <a:t>PHOTO</a:t>
-            </a:r>
-          </a:p>
-        </p:txBody>
-      </p:sp>
+        </p:spPr>
+      </p:pic>
       <p:sp>
         <p:nvSpPr>
           <p:cNvPr id="3" name="Rounded Rectangle 2"/>
@@ -4159,12 +4126,20 @@
         <p:nvPr/>
       </p:nvGrpSpPr>
       <p:grpSpPr/>
-      <p:sp>
-        <p:nvSpPr>
-          <p:cNvPr id="2" name="Rectangle 1"/>
-          <p:cNvSpPr/>
+      <p:pic>
+        <p:nvPicPr>
+          <p:cNvPr id="2" name="Picture 1" descr="1618727070285903912.jpg"/>
+          <p:cNvPicPr>
+            <a:picLocks noChangeAspect="1"/>
+          </p:cNvPicPr>
           <p:nvPr/>
-        </p:nvSpPr>
+        </p:nvPicPr>
+        <p:blipFill>
+          <a:blip r:embed="rId2"/>
+          <a:stretch>
+            <a:fillRect/>
+          </a:stretch>
+        </p:blipFill>
         <p:spPr>
           <a:xfrm>
             <a:off x="0" y="0"/>
@@ -4173,8 +4148,28 @@
           <a:prstGeom prst="rect">
             <a:avLst/>
           </a:prstGeom>
+        </p:spPr>
+      </p:pic>
+      <p:sp>
+        <p:nvSpPr>
+          <p:cNvPr id="3" name="Rounded Rectangle 2"/>
+          <p:cNvSpPr/>
+          <p:nvPr/>
+        </p:nvSpPr>
+        <p:spPr>
+          <a:xfrm>
+            <a:off x="571500" y="952500"/>
+            <a:ext cx="9144000" cy="2190750"/>
+          </a:xfrm>
+          <a:prstGeom prst="roundRect">
+            <a:avLst>
+              <a:gd name="adj" fmla="val 12000"/>
+            </a:avLst>
+          </a:prstGeom>
           <a:solidFill>
-            <a:srgbClr val="A7B097"/>
+            <a:srgbClr val="22371F">
+              <a:alpha val="88000"/>
+            </a:srgbClr>
           </a:solidFill>
           <a:ln>
             <a:noFill/>
@@ -4205,67 +4200,6 @@
               </a:lnSpc>
             </a:pPr>
             <a:r>
-              <a:rPr sz="3300" b="1">
-                <a:solidFill>
-                  <a:srgbClr val="22371F"/>
-                </a:solidFill>
-                <a:latin typeface="Montserrat"/>
-              </a:rPr>
-              <a:t>PHOTO</a:t>
-            </a:r>
-          </a:p>
-        </p:txBody>
-      </p:sp>
-      <p:sp>
-        <p:nvSpPr>
-          <p:cNvPr id="3" name="Rounded Rectangle 2"/>
-          <p:cNvSpPr/>
-          <p:nvPr/>
-        </p:nvSpPr>
-        <p:spPr>
-          <a:xfrm>
-            <a:off x="571500" y="2190750"/>
-            <a:ext cx="9144000" cy="2381250"/>
-          </a:xfrm>
-          <a:prstGeom prst="roundRect">
-            <a:avLst>
-              <a:gd name="adj" fmla="val 12000"/>
-            </a:avLst>
-          </a:prstGeom>
-          <a:solidFill>
-            <a:srgbClr val="22371F">
-              <a:alpha val="88000"/>
-            </a:srgbClr>
-          </a:solidFill>
-          <a:ln>
-            <a:noFill/>
-          </a:ln>
-          <a:effectLst/>
-        </p:spPr>
-        <p:style>
-          <a:lnRef idx="1">
-            <a:schemeClr val="accent1"/>
-          </a:lnRef>
-          <a:fillRef idx="3">
-            <a:schemeClr val="accent1"/>
-          </a:fillRef>
-          <a:effectRef idx="2">
-            <a:schemeClr val="accent1"/>
-          </a:effectRef>
-          <a:fontRef idx="minor">
-            <a:schemeClr val="lt1"/>
-          </a:fontRef>
-        </p:style>
-        <p:txBody>
-          <a:bodyPr rtlCol="0" anchor="ctr" wrap="square" lIns="30" rIns="30" tIns="14" bIns="14"/>
-          <a:lstStyle/>
-          <a:p>
-            <a:pPr algn="ctr">
-              <a:lnSpc>
-                <a:spcPct val="105000"/>
-              </a:lnSpc>
-            </a:pPr>
-            <a:r>
               <a:rPr sz="3900" b="1">
                 <a:solidFill>
                   <a:srgbClr val="F4F1EA"/>
@@ -4285,8 +4219,8 @@
         </p:nvSpPr>
         <p:spPr>
           <a:xfrm>
-            <a:off x="571500" y="5143500"/>
-            <a:ext cx="9144000" cy="2381250"/>
+            <a:off x="571500" y="3333750"/>
+            <a:ext cx="9144000" cy="2095500"/>
           </a:xfrm>
           <a:prstGeom prst="roundRect">
             <a:avLst>
@@ -4526,12 +4460,20 @@
         <p:nvPr/>
       </p:nvGrpSpPr>
       <p:grpSpPr/>
-      <p:sp>
-        <p:nvSpPr>
-          <p:cNvPr id="2" name="Rectangle 1"/>
-          <p:cNvSpPr/>
+      <p:pic>
+        <p:nvPicPr>
+          <p:cNvPr id="2" name="Picture 1" descr="6832500452447924392.jpg"/>
+          <p:cNvPicPr>
+            <a:picLocks noChangeAspect="1"/>
+          </p:cNvPicPr>
           <p:nvPr/>
-        </p:nvSpPr>
+        </p:nvPicPr>
+        <p:blipFill>
+          <a:blip r:embed="rId2"/>
+          <a:stretch>
+            <a:fillRect/>
+          </a:stretch>
+        </p:blipFill>
         <p:spPr>
           <a:xfrm>
             <a:off x="0" y="0"/>
@@ -4540,8 +4482,28 @@
           <a:prstGeom prst="rect">
             <a:avLst/>
           </a:prstGeom>
+        </p:spPr>
+      </p:pic>
+      <p:sp>
+        <p:nvSpPr>
+          <p:cNvPr id="3" name="Rounded Rectangle 2"/>
+          <p:cNvSpPr/>
+          <p:nvPr/>
+        </p:nvSpPr>
+        <p:spPr>
+          <a:xfrm>
+            <a:off x="571500" y="762000"/>
+            <a:ext cx="9144000" cy="1238250"/>
+          </a:xfrm>
+          <a:prstGeom prst="roundRect">
+            <a:avLst>
+              <a:gd name="adj" fmla="val 12000"/>
+            </a:avLst>
+          </a:prstGeom>
           <a:solidFill>
-            <a:srgbClr val="A7B097"/>
+            <a:srgbClr val="22371F">
+              <a:alpha val="88000"/>
+            </a:srgbClr>
           </a:solidFill>
           <a:ln>
             <a:noFill/>
@@ -4572,67 +4534,6 @@
               </a:lnSpc>
             </a:pPr>
             <a:r>
-              <a:rPr sz="3300" b="1">
-                <a:solidFill>
-                  <a:srgbClr val="22371F"/>
-                </a:solidFill>
-                <a:latin typeface="Montserrat"/>
-              </a:rPr>
-              <a:t>PHOTO</a:t>
-            </a:r>
-          </a:p>
-        </p:txBody>
-      </p:sp>
-      <p:sp>
-        <p:nvSpPr>
-          <p:cNvPr id="3" name="Rounded Rectangle 2"/>
-          <p:cNvSpPr/>
-          <p:nvPr/>
-        </p:nvSpPr>
-        <p:spPr>
-          <a:xfrm>
-            <a:off x="571500" y="1905000"/>
-            <a:ext cx="9144000" cy="1238250"/>
-          </a:xfrm>
-          <a:prstGeom prst="roundRect">
-            <a:avLst>
-              <a:gd name="adj" fmla="val 12000"/>
-            </a:avLst>
-          </a:prstGeom>
-          <a:solidFill>
-            <a:srgbClr val="22371F">
-              <a:alpha val="88000"/>
-            </a:srgbClr>
-          </a:solidFill>
-          <a:ln>
-            <a:noFill/>
-          </a:ln>
-          <a:effectLst/>
-        </p:spPr>
-        <p:style>
-          <a:lnRef idx="1">
-            <a:schemeClr val="accent1"/>
-          </a:lnRef>
-          <a:fillRef idx="3">
-            <a:schemeClr val="accent1"/>
-          </a:fillRef>
-          <a:effectRef idx="2">
-            <a:schemeClr val="accent1"/>
-          </a:effectRef>
-          <a:fontRef idx="minor">
-            <a:schemeClr val="lt1"/>
-          </a:fontRef>
-        </p:style>
-        <p:txBody>
-          <a:bodyPr rtlCol="0" anchor="ctr" wrap="square" lIns="30" rIns="30" tIns="14" bIns="14"/>
-          <a:lstStyle/>
-          <a:p>
-            <a:pPr algn="ctr">
-              <a:lnSpc>
-                <a:spcPct val="105000"/>
-              </a:lnSpc>
-            </a:pPr>
-            <a:r>
               <a:rPr sz="3900" b="1">
                 <a:solidFill>
                   <a:srgbClr val="F4F1EA"/>
@@ -4652,8 +4553,8 @@
         </p:nvSpPr>
         <p:spPr>
           <a:xfrm>
-            <a:off x="571500" y="3333750"/>
-            <a:ext cx="9144000" cy="2286000"/>
+            <a:off x="571500" y="2190750"/>
+            <a:ext cx="9144000" cy="1809750"/>
           </a:xfrm>
           <a:prstGeom prst="roundRect">
             <a:avLst>
@@ -4893,12 +4794,20 @@
         <p:nvPr/>
       </p:nvGrpSpPr>
       <p:grpSpPr/>
-      <p:sp>
-        <p:nvSpPr>
-          <p:cNvPr id="2" name="Rectangle 1"/>
-          <p:cNvSpPr/>
+      <p:pic>
+        <p:nvPicPr>
+          <p:cNvPr id="2" name="Picture 1" descr="7755464671366313149.jpg"/>
+          <p:cNvPicPr>
+            <a:picLocks noChangeAspect="1"/>
+          </p:cNvPicPr>
           <p:nvPr/>
-        </p:nvSpPr>
+        </p:nvPicPr>
+        <p:blipFill>
+          <a:blip r:embed="rId2"/>
+          <a:stretch>
+            <a:fillRect/>
+          </a:stretch>
+        </p:blipFill>
         <p:spPr>
           <a:xfrm>
             <a:off x="0" y="0"/>
@@ -4907,8 +4816,28 @@
           <a:prstGeom prst="rect">
             <a:avLst/>
           </a:prstGeom>
+        </p:spPr>
+      </p:pic>
+      <p:sp>
+        <p:nvSpPr>
+          <p:cNvPr id="3" name="Rounded Rectangle 2"/>
+          <p:cNvSpPr/>
+          <p:nvPr/>
+        </p:nvSpPr>
+        <p:spPr>
+          <a:xfrm>
+            <a:off x="571500" y="857250"/>
+            <a:ext cx="9144000" cy="1809750"/>
+          </a:xfrm>
+          <a:prstGeom prst="roundRect">
+            <a:avLst>
+              <a:gd name="adj" fmla="val 12000"/>
+            </a:avLst>
+          </a:prstGeom>
           <a:solidFill>
-            <a:srgbClr val="A7B097"/>
+            <a:srgbClr val="22371F">
+              <a:alpha val="88000"/>
+            </a:srgbClr>
           </a:solidFill>
           <a:ln>
             <a:noFill/>
@@ -4939,67 +4868,6 @@
               </a:lnSpc>
             </a:pPr>
             <a:r>
-              <a:rPr sz="3300" b="1">
-                <a:solidFill>
-                  <a:srgbClr val="22371F"/>
-                </a:solidFill>
-                <a:latin typeface="Montserrat"/>
-              </a:rPr>
-              <a:t>PHOTO</a:t>
-            </a:r>
-          </a:p>
-        </p:txBody>
-      </p:sp>
-      <p:sp>
-        <p:nvSpPr>
-          <p:cNvPr id="3" name="Rounded Rectangle 2"/>
-          <p:cNvSpPr/>
-          <p:nvPr/>
-        </p:nvSpPr>
-        <p:spPr>
-          <a:xfrm>
-            <a:off x="571500" y="3048000"/>
-            <a:ext cx="9144000" cy="2000250"/>
-          </a:xfrm>
-          <a:prstGeom prst="roundRect">
-            <a:avLst>
-              <a:gd name="adj" fmla="val 12000"/>
-            </a:avLst>
-          </a:prstGeom>
-          <a:solidFill>
-            <a:srgbClr val="22371F">
-              <a:alpha val="88000"/>
-            </a:srgbClr>
-          </a:solidFill>
-          <a:ln>
-            <a:noFill/>
-          </a:ln>
-          <a:effectLst/>
-        </p:spPr>
-        <p:style>
-          <a:lnRef idx="1">
-            <a:schemeClr val="accent1"/>
-          </a:lnRef>
-          <a:fillRef idx="3">
-            <a:schemeClr val="accent1"/>
-          </a:fillRef>
-          <a:effectRef idx="2">
-            <a:schemeClr val="accent1"/>
-          </a:effectRef>
-          <a:fontRef idx="minor">
-            <a:schemeClr val="lt1"/>
-          </a:fontRef>
-        </p:style>
-        <p:txBody>
-          <a:bodyPr rtlCol="0" anchor="ctr" wrap="square" lIns="30" rIns="30" tIns="14" bIns="14"/>
-          <a:lstStyle/>
-          <a:p>
-            <a:pPr algn="ctr">
-              <a:lnSpc>
-                <a:spcPct val="105000"/>
-              </a:lnSpc>
-            </a:pPr>
-            <a:r>
               <a:rPr sz="3900" b="1">
                 <a:solidFill>
                   <a:srgbClr val="F4F1EA"/>
@@ -5019,8 +4887,8 @@
         </p:nvSpPr>
         <p:spPr>
           <a:xfrm>
-            <a:off x="571500" y="5334000"/>
-            <a:ext cx="9144000" cy="1238250"/>
+            <a:off x="571500" y="2857500"/>
+            <a:ext cx="9144000" cy="1143000"/>
           </a:xfrm>
           <a:prstGeom prst="roundRect">
             <a:avLst>
@@ -5260,12 +5128,20 @@
         <p:nvPr/>
       </p:nvGrpSpPr>
       <p:grpSpPr/>
-      <p:sp>
-        <p:nvSpPr>
-          <p:cNvPr id="2" name="Rectangle 1"/>
-          <p:cNvSpPr/>
+      <p:pic>
+        <p:nvPicPr>
+          <p:cNvPr id="2" name="Picture 1" descr="1314624559186166345.jpg"/>
+          <p:cNvPicPr>
+            <a:picLocks noChangeAspect="1"/>
+          </p:cNvPicPr>
           <p:nvPr/>
-        </p:nvSpPr>
+        </p:nvPicPr>
+        <p:blipFill>
+          <a:blip r:embed="rId2"/>
+          <a:stretch>
+            <a:fillRect/>
+          </a:stretch>
+        </p:blipFill>
         <p:spPr>
           <a:xfrm>
             <a:off x="0" y="0"/>
@@ -5274,8 +5150,28 @@
           <a:prstGeom prst="rect">
             <a:avLst/>
           </a:prstGeom>
+        </p:spPr>
+      </p:pic>
+      <p:sp>
+        <p:nvSpPr>
+          <p:cNvPr id="3" name="Rounded Rectangle 2"/>
+          <p:cNvSpPr/>
+          <p:nvPr/>
+        </p:nvSpPr>
+        <p:spPr>
+          <a:xfrm>
+            <a:off x="571500" y="476250"/>
+            <a:ext cx="9144000" cy="1809750"/>
+          </a:xfrm>
+          <a:prstGeom prst="roundRect">
+            <a:avLst>
+              <a:gd name="adj" fmla="val 12000"/>
+            </a:avLst>
+          </a:prstGeom>
           <a:solidFill>
-            <a:srgbClr val="A7B097"/>
+            <a:srgbClr val="22371F">
+              <a:alpha val="88000"/>
+            </a:srgbClr>
           </a:solidFill>
           <a:ln>
             <a:noFill/>
@@ -5306,68 +5202,7 @@
               </a:lnSpc>
             </a:pPr>
             <a:r>
-              <a:rPr sz="3300" b="1">
-                <a:solidFill>
-                  <a:srgbClr val="22371F"/>
-                </a:solidFill>
-                <a:latin typeface="Montserrat"/>
-              </a:rPr>
-              <a:t>PHOTO</a:t>
-            </a:r>
-          </a:p>
-        </p:txBody>
-      </p:sp>
-      <p:sp>
-        <p:nvSpPr>
-          <p:cNvPr id="3" name="Rounded Rectangle 2"/>
-          <p:cNvSpPr/>
-          <p:nvPr/>
-        </p:nvSpPr>
-        <p:spPr>
-          <a:xfrm>
-            <a:off x="571500" y="1619250"/>
-            <a:ext cx="9144000" cy="2190750"/>
-          </a:xfrm>
-          <a:prstGeom prst="roundRect">
-            <a:avLst>
-              <a:gd name="adj" fmla="val 12000"/>
-            </a:avLst>
-          </a:prstGeom>
-          <a:solidFill>
-            <a:srgbClr val="22371F">
-              <a:alpha val="88000"/>
-            </a:srgbClr>
-          </a:solidFill>
-          <a:ln>
-            <a:noFill/>
-          </a:ln>
-          <a:effectLst/>
-        </p:spPr>
-        <p:style>
-          <a:lnRef idx="1">
-            <a:schemeClr val="accent1"/>
-          </a:lnRef>
-          <a:fillRef idx="3">
-            <a:schemeClr val="accent1"/>
-          </a:fillRef>
-          <a:effectRef idx="2">
-            <a:schemeClr val="accent1"/>
-          </a:effectRef>
-          <a:fontRef idx="minor">
-            <a:schemeClr val="lt1"/>
-          </a:fontRef>
-        </p:style>
-        <p:txBody>
-          <a:bodyPr rtlCol="0" anchor="ctr" wrap="square" lIns="30" rIns="30" tIns="14" bIns="14"/>
-          <a:lstStyle/>
-          <a:p>
-            <a:pPr algn="ctr">
-              <a:lnSpc>
-                <a:spcPct val="105000"/>
-              </a:lnSpc>
-            </a:pPr>
-            <a:r>
-              <a:rPr sz="4200" b="1">
+              <a:rPr sz="3750" b="1">
                 <a:solidFill>
                   <a:srgbClr val="F4F1EA"/>
                 </a:solidFill>

--- a/templates/carousels/photo-led-carousel.pptx
+++ b/templates/carousels/photo-led-carousel.pptx
@@ -716,7 +716,7 @@
           <a:lstStyle/>
           <a:p>
             <a:r>
-              <a:t>Photo: assets/photo/hand-soil-roots-fungi.jpg. Same layout, panels kept to the top third.</a:t>
+              <a:t>Photo: assets/photo/erc-rancho-cacachilas-agro.jpg (crop rows under a wide sky). Panels sit in the sky.</a:t>
             </a:r>
           </a:p>
         </p:txBody>
@@ -3794,7 +3794,7 @@
       <p:grpSpPr/>
       <p:pic>
         <p:nvPicPr>
-          <p:cNvPr id="2" name="Picture 1" descr="3812193197056478006.jpg"/>
+          <p:cNvPr id="2" name="Picture 1" descr="8284748044392281135.jpg"/>
           <p:cNvPicPr>
             <a:picLocks noChangeAspect="1"/>
           </p:cNvPicPr>
@@ -4128,7 +4128,7 @@
       <p:grpSpPr/>
       <p:pic>
         <p:nvPicPr>
-          <p:cNvPr id="2" name="Picture 1" descr="1618727070285903912.jpg"/>
+          <p:cNvPr id="2" name="Picture 1" descr="6680318646487736988.jpg"/>
           <p:cNvPicPr>
             <a:picLocks noChangeAspect="1"/>
           </p:cNvPicPr>
@@ -4462,7 +4462,7 @@
       <p:grpSpPr/>
       <p:pic>
         <p:nvPicPr>
-          <p:cNvPr id="2" name="Picture 1" descr="6832500452447924392.jpg"/>
+          <p:cNvPr id="2" name="Picture 1" descr="8786642421847334262.jpg"/>
           <p:cNvPicPr>
             <a:picLocks noChangeAspect="1"/>
           </p:cNvPicPr>
@@ -4796,7 +4796,7 @@
       <p:grpSpPr/>
       <p:pic>
         <p:nvPicPr>
-          <p:cNvPr id="2" name="Picture 1" descr="7755464671366313149.jpg"/>
+          <p:cNvPr id="2" name="Picture 1" descr="2407834678506028425.jpg"/>
           <p:cNvPicPr>
             <a:picLocks noChangeAspect="1"/>
           </p:cNvPicPr>
@@ -5130,7 +5130,7 @@
       <p:grpSpPr/>
       <p:pic>
         <p:nvPicPr>
-          <p:cNvPr id="2" name="Picture 1" descr="1314624559186166345.jpg"/>
+          <p:cNvPr id="2" name="Picture 1" descr="1765256235290983748.jpg"/>
           <p:cNvPicPr>
             <a:picLocks noChangeAspect="1"/>
           </p:cNvPicPr>

--- a/templates/carousels/photo-led-carousel.pptx
+++ b/templates/carousels/photo-led-carousel.pptx
@@ -3794,7 +3794,7 @@
       <p:grpSpPr/>
       <p:pic>
         <p:nvPicPr>
-          <p:cNvPr id="2" name="Picture 1" descr="8284748044392281135.jpg"/>
+          <p:cNvPr id="2" name="Picture 1" descr="1174023459870682806.jpg"/>
           <p:cNvPicPr>
             <a:picLocks noChangeAspect="1"/>
           </p:cNvPicPr>
@@ -4062,7 +4062,7 @@
           <a:lstStyle/>
           <a:p>
             <a:r>
-              <a:rPr sz="2550" b="1">
+              <a:rPr sz="2850" b="1">
                 <a:solidFill>
                   <a:srgbClr val="DBE6A7"/>
                 </a:solidFill>
@@ -4097,7 +4097,7 @@
           <a:p>
             <a:pPr algn="r"/>
             <a:r>
-              <a:rPr sz="2250">
+              <a:rPr sz="2700">
                 <a:solidFill>
                   <a:srgbClr val="F4F1EA"/>
                 </a:solidFill>
@@ -4128,7 +4128,7 @@
       <p:grpSpPr/>
       <p:pic>
         <p:nvPicPr>
-          <p:cNvPr id="2" name="Picture 1" descr="6680318646487736988.jpg"/>
+          <p:cNvPr id="2" name="Picture 1" descr="7370831635295123859.jpg"/>
           <p:cNvPicPr>
             <a:picLocks noChangeAspect="1"/>
           </p:cNvPicPr>
@@ -4396,7 +4396,7 @@
           <a:lstStyle/>
           <a:p>
             <a:r>
-              <a:rPr sz="2550" b="1">
+              <a:rPr sz="2850" b="1">
                 <a:solidFill>
                   <a:srgbClr val="DBE6A7"/>
                 </a:solidFill>
@@ -4431,7 +4431,7 @@
           <a:p>
             <a:pPr algn="r"/>
             <a:r>
-              <a:rPr sz="2250">
+              <a:rPr sz="2700">
                 <a:solidFill>
                   <a:srgbClr val="F4F1EA"/>
                 </a:solidFill>
@@ -4462,7 +4462,7 @@
       <p:grpSpPr/>
       <p:pic>
         <p:nvPicPr>
-          <p:cNvPr id="2" name="Picture 1" descr="8786642421847334262.jpg"/>
+          <p:cNvPr id="2" name="Picture 1" descr="1261896892832671200.jpg"/>
           <p:cNvPicPr>
             <a:picLocks noChangeAspect="1"/>
           </p:cNvPicPr>
@@ -4730,7 +4730,7 @@
           <a:lstStyle/>
           <a:p>
             <a:r>
-              <a:rPr sz="2550" b="1">
+              <a:rPr sz="2850" b="1">
                 <a:solidFill>
                   <a:srgbClr val="DBE6A7"/>
                 </a:solidFill>
@@ -4765,7 +4765,7 @@
           <a:p>
             <a:pPr algn="r"/>
             <a:r>
-              <a:rPr sz="2250">
+              <a:rPr sz="2700">
                 <a:solidFill>
                   <a:srgbClr val="F4F1EA"/>
                 </a:solidFill>
@@ -4796,7 +4796,7 @@
       <p:grpSpPr/>
       <p:pic>
         <p:nvPicPr>
-          <p:cNvPr id="2" name="Picture 1" descr="2407834678506028425.jpg"/>
+          <p:cNvPr id="2" name="Picture 1" descr="624296073963910333.jpg"/>
           <p:cNvPicPr>
             <a:picLocks noChangeAspect="1"/>
           </p:cNvPicPr>
@@ -5064,7 +5064,7 @@
           <a:lstStyle/>
           <a:p>
             <a:r>
-              <a:rPr sz="2550" b="1">
+              <a:rPr sz="2850" b="1">
                 <a:solidFill>
                   <a:srgbClr val="DBE6A7"/>
                 </a:solidFill>
@@ -5099,7 +5099,7 @@
           <a:p>
             <a:pPr algn="r"/>
             <a:r>
-              <a:rPr sz="2250">
+              <a:rPr sz="2700">
                 <a:solidFill>
                   <a:srgbClr val="F4F1EA"/>
                 </a:solidFill>
@@ -5130,7 +5130,7 @@
       <p:grpSpPr/>
       <p:pic>
         <p:nvPicPr>
-          <p:cNvPr id="2" name="Picture 1" descr="1765256235290983748.jpg"/>
+          <p:cNvPr id="2" name="Picture 1" descr="462758567913357289.jpg"/>
           <p:cNvPicPr>
             <a:picLocks noChangeAspect="1"/>
           </p:cNvPicPr>
@@ -5337,7 +5337,7 @@
           <a:lstStyle/>
           <a:p>
             <a:r>
-              <a:rPr sz="2550" b="1">
+              <a:rPr sz="2850" b="1">
                 <a:solidFill>
                   <a:srgbClr val="DBE6A7"/>
                 </a:solidFill>
@@ -5372,7 +5372,7 @@
           <a:p>
             <a:pPr algn="r"/>
             <a:r>
-              <a:rPr sz="2250">
+              <a:rPr sz="2700">
                 <a:solidFill>
                   <a:srgbClr val="F4F1EA"/>
                 </a:solidFill>
